--- a/diapositivas/Practica4_PilasColas.pptx
+++ b/diapositivas/Practica4_PilasColas.pptx
@@ -5419,7 +5419,7 @@
           <a:lstStyle/>
           <a:p>
             <a:r>
-              <a:rPr lang="es-ES" sz="1550" b="0">
+              <a:rPr lang="es-ES" sz="1550" b="0" dirty="0">
                 <a:solidFill>
                   <a:srgbClr val="333333"/>
                 </a:solidFill>
@@ -5427,7 +5427,7 @@
               </a:rPr>
               <a:t>[Ana, Ana, Luis]</a:t>
             </a:r>
-            <a:endParaRPr/>
+            <a:endParaRPr dirty="0"/>
           </a:p>
         </p:txBody>
       </p:sp>
@@ -5897,8 +5897,8 @@
         </p:nvSpPr>
         <p:spPr>
           <a:xfrm>
-            <a:off x="7730000" y="2230000"/>
-            <a:ext cx="3880000" cy="450000"/>
+            <a:off x="7730000" y="2276227"/>
+            <a:ext cx="3880000" cy="357545"/>
           </a:xfrm>
           <a:prstGeom prst="roundRect">
             <a:avLst/>
@@ -5917,15 +5917,15 @@
           <a:lstStyle/>
           <a:p>
             <a:r>
-              <a:rPr lang="es-ES" sz="1500" b="1">
+              <a:rPr lang="es-ES" sz="1500" b="1" dirty="0">
                 <a:solidFill>
                   <a:srgbClr val="FFFFFF"/>
                 </a:solidFill>
                 <a:latin typeface="Segoe UI"/>
               </a:rPr>
-              <a:t>Respuesta nueva</a:t>
-            </a:r>
-            <a:endParaRPr/>
+              <a:t>Resultado</a:t>
+            </a:r>
+            <a:endParaRPr dirty="0"/>
           </a:p>
         </p:txBody>
       </p:sp>
@@ -6017,8 +6017,8 @@
         </p:nvSpPr>
         <p:spPr>
           <a:xfrm>
-            <a:off x="7730000" y="2720000"/>
-            <a:ext cx="3880000" cy="470000"/>
+            <a:off x="7730000" y="2771971"/>
+            <a:ext cx="3880000" cy="366058"/>
           </a:xfrm>
           <a:prstGeom prst="roundRect">
             <a:avLst/>
@@ -6037,15 +6037,15 @@
           <a:lstStyle/>
           <a:p>
             <a:r>
-              <a:rPr lang="es-ES" sz="1550" b="0">
+              <a:rPr lang="es-ES" sz="1550" dirty="0">
                 <a:solidFill>
                   <a:srgbClr val="333333"/>
                 </a:solidFill>
                 <a:latin typeface="Segoe UI"/>
               </a:rPr>
-              <a:t>añade Luis</a:t>
-            </a:r>
-            <a:endParaRPr/>
+              <a:t>[Ana, Ana, Luis, Luis]</a:t>
+            </a:r>
+            <a:endParaRPr lang="es-ES" sz="1600" dirty="0"/>
           </a:p>
         </p:txBody>
       </p:sp>
@@ -6137,8 +6137,8 @@
         </p:nvSpPr>
         <p:spPr>
           <a:xfrm>
-            <a:off x="7730000" y="3260000"/>
-            <a:ext cx="3880000" cy="470000"/>
+            <a:off x="7730000" y="3311971"/>
+            <a:ext cx="3880000" cy="366058"/>
           </a:xfrm>
           <a:prstGeom prst="roundRect">
             <a:avLst/>
@@ -6157,15 +6157,15 @@
           <a:lstStyle/>
           <a:p>
             <a:r>
-              <a:rPr lang="es-ES" sz="1550" b="0">
+              <a:rPr lang="es-ES" sz="1550" dirty="0">
                 <a:solidFill>
                   <a:srgbClr val="333333"/>
                 </a:solidFill>
                 <a:latin typeface="Segoe UI"/>
               </a:rPr>
-              <a:t>sin respuesta</a:t>
-            </a:r>
-            <a:endParaRPr/>
+              <a:t>[Ana, Ana, Luis, Luis]</a:t>
+            </a:r>
+            <a:endParaRPr lang="es-ES" sz="1600" dirty="0"/>
           </a:p>
         </p:txBody>
       </p:sp>
@@ -6257,8 +6257,8 @@
         </p:nvSpPr>
         <p:spPr>
           <a:xfrm>
-            <a:off x="7730000" y="3800000"/>
-            <a:ext cx="3880000" cy="470000"/>
+            <a:off x="7730000" y="3851971"/>
+            <a:ext cx="3880000" cy="366058"/>
           </a:xfrm>
           <a:prstGeom prst="roundRect">
             <a:avLst/>
@@ -6277,15 +6277,33 @@
           <a:lstStyle/>
           <a:p>
             <a:r>
-              <a:rPr lang="es-ES" sz="1550" b="0">
+              <a:rPr lang="es-ES" sz="1550" dirty="0">
                 <a:solidFill>
                   <a:srgbClr val="333333"/>
                 </a:solidFill>
                 <a:latin typeface="Segoe UI"/>
               </a:rPr>
-              <a:t>añade Eva</a:t>
-            </a:r>
-            <a:endParaRPr/>
+              <a:t>[Ana, Ana, Luis, </a:t>
+            </a:r>
+            <a:r>
+              <a:rPr lang="es-ES" sz="1550" dirty="0" err="1">
+                <a:solidFill>
+                  <a:srgbClr val="333333"/>
+                </a:solidFill>
+                <a:latin typeface="Segoe UI"/>
+              </a:rPr>
+              <a:t>Luis,Eva</a:t>
+            </a:r>
+            <a:r>
+              <a:rPr lang="es-ES" sz="1550" dirty="0">
+                <a:solidFill>
+                  <a:srgbClr val="333333"/>
+                </a:solidFill>
+                <a:latin typeface="Segoe UI"/>
+              </a:rPr>
+              <a:t>]</a:t>
+            </a:r>
+            <a:endParaRPr lang="es-ES" sz="1600" dirty="0"/>
           </a:p>
         </p:txBody>
       </p:sp>
@@ -6377,8 +6395,8 @@
         </p:nvSpPr>
         <p:spPr>
           <a:xfrm>
-            <a:off x="7730000" y="4340000"/>
-            <a:ext cx="3880000" cy="470000"/>
+            <a:off x="7730000" y="4391971"/>
+            <a:ext cx="3880000" cy="366058"/>
           </a:xfrm>
           <a:prstGeom prst="roundRect">
             <a:avLst/>
@@ -6397,15 +6415,15 @@
           <a:lstStyle/>
           <a:p>
             <a:r>
-              <a:rPr lang="es-ES" sz="1550" b="0">
+              <a:rPr lang="es-ES" sz="1550" dirty="0">
                 <a:solidFill>
                   <a:srgbClr val="333333"/>
                 </a:solidFill>
                 <a:latin typeface="Segoe UI"/>
               </a:rPr>
-              <a:t>añade Paco</a:t>
-            </a:r>
-            <a:endParaRPr/>
+              <a:t>[Ana, Ana, Luis, Luis, Paco]</a:t>
+            </a:r>
+            <a:endParaRPr lang="es-ES" sz="1600" dirty="0"/>
           </a:p>
         </p:txBody>
       </p:sp>
@@ -6497,8 +6515,8 @@
         </p:nvSpPr>
         <p:spPr>
           <a:xfrm>
-            <a:off x="7730000" y="4880000"/>
-            <a:ext cx="3880000" cy="470000"/>
+            <a:off x="7730000" y="4931971"/>
+            <a:ext cx="3880000" cy="366058"/>
           </a:xfrm>
           <a:prstGeom prst="roundRect">
             <a:avLst/>
@@ -6517,15 +6535,15 @@
           <a:lstStyle/>
           <a:p>
             <a:r>
-              <a:rPr lang="es-ES" sz="1550" b="0">
+              <a:rPr lang="es-ES" sz="1550" dirty="0">
                 <a:solidFill>
                   <a:srgbClr val="333333"/>
                 </a:solidFill>
                 <a:latin typeface="Segoe UI"/>
               </a:rPr>
-              <a:t>añade VACIA</a:t>
-            </a:r>
-            <a:endParaRPr/>
+              <a:t>[Ana, Ana, Luis, Luis, Paco, VACIA]</a:t>
+            </a:r>
+            <a:endParaRPr lang="es-ES" sz="1600" dirty="0"/>
           </a:p>
         </p:txBody>
       </p:sp>

--- a/diapositivas/Practica4_PilasColas.pptx
+++ b/diapositivas/Practica4_PilasColas.pptx
@@ -573,7 +573,7 @@
           <a:p>
             <a:fld id="{5BCAD085-E8A6-8845-BD4E-CB4CCA059FC4}" type="datetimeFigureOut">
               <a:rPr lang="en-US" smtClean="0"/>
-              <a:t>10/19/2026</a:t>
+              <a:t>10/20/2026</a:t>
             </a:fld>
             <a:endParaRPr lang="en-US"/>
           </a:p>
@@ -741,7 +741,7 @@
           <a:p>
             <a:fld id="{5BCAD085-E8A6-8845-BD4E-CB4CCA059FC4}" type="datetimeFigureOut">
               <a:rPr lang="en-US" smtClean="0"/>
-              <a:t>10/19/2026</a:t>
+              <a:t>10/20/2026</a:t>
             </a:fld>
             <a:endParaRPr lang="en-US"/>
           </a:p>
@@ -919,7 +919,7 @@
           <a:p>
             <a:fld id="{5BCAD085-E8A6-8845-BD4E-CB4CCA059FC4}" type="datetimeFigureOut">
               <a:rPr lang="en-US" smtClean="0"/>
-              <a:t>10/19/2026</a:t>
+              <a:t>10/20/2026</a:t>
             </a:fld>
             <a:endParaRPr lang="en-US"/>
           </a:p>
@@ -1087,7 +1087,7 @@
           <a:p>
             <a:fld id="{5BCAD085-E8A6-8845-BD4E-CB4CCA059FC4}" type="datetimeFigureOut">
               <a:rPr lang="en-US" smtClean="0"/>
-              <a:t>10/19/2026</a:t>
+              <a:t>10/20/2026</a:t>
             </a:fld>
             <a:endParaRPr lang="en-US"/>
           </a:p>
@@ -1332,7 +1332,7 @@
           <a:p>
             <a:fld id="{5BCAD085-E8A6-8845-BD4E-CB4CCA059FC4}" type="datetimeFigureOut">
               <a:rPr lang="en-US" smtClean="0"/>
-              <a:t>10/19/2026</a:t>
+              <a:t>10/20/2026</a:t>
             </a:fld>
             <a:endParaRPr lang="en-US"/>
           </a:p>
@@ -1617,7 +1617,7 @@
           <a:p>
             <a:fld id="{5BCAD085-E8A6-8845-BD4E-CB4CCA059FC4}" type="datetimeFigureOut">
               <a:rPr lang="en-US" smtClean="0"/>
-              <a:t>10/19/2026</a:t>
+              <a:t>10/20/2026</a:t>
             </a:fld>
             <a:endParaRPr lang="en-US"/>
           </a:p>
@@ -2036,7 +2036,7 @@
           <a:p>
             <a:fld id="{5BCAD085-E8A6-8845-BD4E-CB4CCA059FC4}" type="datetimeFigureOut">
               <a:rPr lang="en-US" smtClean="0"/>
-              <a:t>10/19/2026</a:t>
+              <a:t>10/20/2026</a:t>
             </a:fld>
             <a:endParaRPr lang="en-US"/>
           </a:p>
@@ -2153,7 +2153,7 @@
           <a:p>
             <a:fld id="{5BCAD085-E8A6-8845-BD4E-CB4CCA059FC4}" type="datetimeFigureOut">
               <a:rPr lang="en-US" smtClean="0"/>
-              <a:t>10/19/2026</a:t>
+              <a:t>10/20/2026</a:t>
             </a:fld>
             <a:endParaRPr lang="en-US"/>
           </a:p>
@@ -2248,7 +2248,7 @@
           <a:p>
             <a:fld id="{5BCAD085-E8A6-8845-BD4E-CB4CCA059FC4}" type="datetimeFigureOut">
               <a:rPr lang="en-US" smtClean="0"/>
-              <a:t>10/19/2026</a:t>
+              <a:t>10/20/2026</a:t>
             </a:fld>
             <a:endParaRPr lang="en-US"/>
           </a:p>
@@ -2523,7 +2523,7 @@
           <a:p>
             <a:fld id="{5BCAD085-E8A6-8845-BD4E-CB4CCA059FC4}" type="datetimeFigureOut">
               <a:rPr lang="en-US" smtClean="0"/>
-              <a:t>10/19/2026</a:t>
+              <a:t>10/20/2026</a:t>
             </a:fld>
             <a:endParaRPr lang="en-US"/>
           </a:p>
@@ -2775,7 +2775,7 @@
           <a:p>
             <a:fld id="{5BCAD085-E8A6-8845-BD4E-CB4CCA059FC4}" type="datetimeFigureOut">
               <a:rPr lang="en-US" smtClean="0"/>
-              <a:t>10/19/2026</a:t>
+              <a:t>10/20/2026</a:t>
             </a:fld>
             <a:endParaRPr lang="en-US"/>
           </a:p>
@@ -2986,7 +2986,7 @@
           <a:p>
             <a:fld id="{5BCAD085-E8A6-8845-BD4E-CB4CCA059FC4}" type="datetimeFigureOut">
               <a:rPr lang="en-US" smtClean="0"/>
-              <a:t>10/19/2026</a:t>
+              <a:t>10/20/2026</a:t>
             </a:fld>
             <a:endParaRPr lang="en-US"/>
           </a:p>
@@ -9519,7 +9519,7 @@
           <p:nvPr>
             <p:extLst>
               <p:ext uri="{D42A27DB-BD31-4B8C-83A1-F6EECF244321}">
-                <p14:modId xmlns:p14="http://schemas.microsoft.com/office/powerpoint/2010/main" val="513778106"/>
+                <p14:modId xmlns:p14="http://schemas.microsoft.com/office/powerpoint/2010/main" val="2242250484"/>
               </p:ext>
             </p:extLst>
           </p:nvPr>
@@ -9714,7 +9714,7 @@
                           <a:ea typeface="Segoe UI"/>
                           <a:cs typeface="Segoe UI"/>
                         </a:rPr>
-                        <a:t>d.appendleft</a:t>
+                        <a:t>d.append</a:t>
                       </a:r>
                       <a:r>
                         <a:rPr lang="es-ES" sz="1600" b="0" i="0" dirty="0">
@@ -9736,7 +9736,7 @@
                           <a:ea typeface="Segoe UI"/>
                           <a:cs typeface="Segoe UI"/>
                         </a:rPr>
-                        <a:t>d.append</a:t>
+                        <a:t>d.appendleft</a:t>
                       </a:r>
                       <a:r>
                         <a:rPr lang="es-ES" sz="1600" b="0" i="0" dirty="0">
@@ -9892,7 +9892,7 @@
                           <a:ea typeface="Segoe UI"/>
                           <a:cs typeface="Segoe UI"/>
                         </a:rPr>
-                        <a:t>d.popleft</a:t>
+                        <a:t>d.pop</a:t>
                       </a:r>
                       <a:r>
                         <a:rPr lang="es-ES" sz="1600" b="0" i="0" dirty="0">
@@ -9914,10 +9914,10 @@
                           <a:ea typeface="Segoe UI"/>
                           <a:cs typeface="Segoe UI"/>
                         </a:rPr>
-                        <a:t>d.pop</a:t>
+                        <a:t>d</a:t>
                       </a:r>
                       <a:r>
-                        <a:rPr lang="es-ES" sz="1600" b="0" i="0" dirty="0">
+                        <a:rPr lang="es-ES" sz="1600" b="0" i="0" err="1">
                           <a:solidFill>
                             <a:srgbClr val="333333"/>
                           </a:solidFill>
@@ -9925,8 +9925,27 @@
                           <a:ea typeface="Segoe UI"/>
                           <a:cs typeface="Segoe UI"/>
                         </a:rPr>
-                        <a:t>()</a:t>
+                        <a:t>.</a:t>
                       </a:r>
+                      <a:r>
+                        <a:rPr lang="es-ES" sz="1600" b="0" i="0">
+                          <a:solidFill>
+                            <a:srgbClr val="333333"/>
+                          </a:solidFill>
+                          <a:latin typeface="Segoe UI"/>
+                          <a:ea typeface="Segoe UI"/>
+                          <a:cs typeface="Segoe UI"/>
+                        </a:rPr>
+                        <a:t>popleft()</a:t>
+                      </a:r>
+                      <a:endParaRPr lang="es-ES" sz="1600" b="0" i="0" dirty="0">
+                        <a:solidFill>
+                          <a:srgbClr val="333333"/>
+                        </a:solidFill>
+                        <a:latin typeface="Segoe UI"/>
+                        <a:ea typeface="Segoe UI"/>
+                        <a:cs typeface="Segoe UI"/>
+                      </a:endParaRPr>
                     </a:p>
                   </a:txBody>
                   <a:tcPr/>
